--- a/presentation/Nexflix_Viewership_Analysis_Presentation.pptx
+++ b/presentation/Nexflix_Viewership_Analysis_Presentation.pptx
@@ -216,7 +216,7 @@
           <a:p>
             <a:fld id="{135615A5-ECDE-4D82-B9B1-FDC0E5B771E4}" type="datetimeFigureOut">
               <a:rPr lang="en-US" smtClean="0"/>
-              <a:t>9/12/2026</a:t>
+              <a:t>9/13/2026</a:t>
             </a:fld>
             <a:endParaRPr lang="en-US"/>
           </a:p>
@@ -2190,7 +2190,7 @@
           <a:p>
             <a:fld id="{A328F5EC-9457-4081-BA83-1A88B6A3A08E}" type="datetimeFigureOut">
               <a:rPr lang="en-US" smtClean="0"/>
-              <a:t>9/12/2026</a:t>
+              <a:t>9/13/2026</a:t>
             </a:fld>
             <a:endParaRPr lang="en-US"/>
           </a:p>
@@ -2388,7 +2388,7 @@
           <a:p>
             <a:fld id="{A328F5EC-9457-4081-BA83-1A88B6A3A08E}" type="datetimeFigureOut">
               <a:rPr lang="en-US" smtClean="0"/>
-              <a:t>9/12/2026</a:t>
+              <a:t>9/13/2026</a:t>
             </a:fld>
             <a:endParaRPr lang="en-US"/>
           </a:p>
@@ -2596,7 +2596,7 @@
           <a:p>
             <a:fld id="{A328F5EC-9457-4081-BA83-1A88B6A3A08E}" type="datetimeFigureOut">
               <a:rPr lang="en-US" smtClean="0"/>
-              <a:t>9/12/2026</a:t>
+              <a:t>9/13/2026</a:t>
             </a:fld>
             <a:endParaRPr lang="en-US"/>
           </a:p>
@@ -2827,7 +2827,7 @@
                 <a:tabLst/>
                 <a:defRPr/>
               </a:pPr>
-              <a:t>9/12/2026</a:t>
+              <a:t>9/13/2026</a:t>
             </a:fld>
             <a:endParaRPr kumimoji="0" sz="1200" b="0" i="0" u="none" strike="noStrike" kern="1200" cap="none" spc="0" normalizeH="0" baseline="0" noProof="0">
               <a:ln>
@@ -3136,7 +3136,7 @@
           <a:p>
             <a:fld id="{A328F5EC-9457-4081-BA83-1A88B6A3A08E}" type="datetimeFigureOut">
               <a:rPr lang="en-US" smtClean="0"/>
-              <a:t>9/12/2026</a:t>
+              <a:t>9/13/2026</a:t>
             </a:fld>
             <a:endParaRPr lang="en-US"/>
           </a:p>
@@ -3411,7 +3411,7 @@
           <a:p>
             <a:fld id="{A328F5EC-9457-4081-BA83-1A88B6A3A08E}" type="datetimeFigureOut">
               <a:rPr lang="en-US" smtClean="0"/>
-              <a:t>9/12/2026</a:t>
+              <a:t>9/13/2026</a:t>
             </a:fld>
             <a:endParaRPr lang="en-US"/>
           </a:p>
@@ -3676,7 +3676,7 @@
           <a:p>
             <a:fld id="{A328F5EC-9457-4081-BA83-1A88B6A3A08E}" type="datetimeFigureOut">
               <a:rPr lang="en-US" smtClean="0"/>
-              <a:t>9/12/2026</a:t>
+              <a:t>9/13/2026</a:t>
             </a:fld>
             <a:endParaRPr lang="en-US"/>
           </a:p>
@@ -4088,7 +4088,7 @@
           <a:p>
             <a:fld id="{A328F5EC-9457-4081-BA83-1A88B6A3A08E}" type="datetimeFigureOut">
               <a:rPr lang="en-US" smtClean="0"/>
-              <a:t>9/12/2026</a:t>
+              <a:t>9/13/2026</a:t>
             </a:fld>
             <a:endParaRPr lang="en-US"/>
           </a:p>
@@ -4229,7 +4229,7 @@
           <a:p>
             <a:fld id="{A328F5EC-9457-4081-BA83-1A88B6A3A08E}" type="datetimeFigureOut">
               <a:rPr lang="en-US" smtClean="0"/>
-              <a:t>9/12/2026</a:t>
+              <a:t>9/13/2026</a:t>
             </a:fld>
             <a:endParaRPr lang="en-US"/>
           </a:p>
@@ -4342,7 +4342,7 @@
           <a:p>
             <a:fld id="{A328F5EC-9457-4081-BA83-1A88B6A3A08E}" type="datetimeFigureOut">
               <a:rPr lang="en-US" smtClean="0"/>
-              <a:t>9/12/2026</a:t>
+              <a:t>9/13/2026</a:t>
             </a:fld>
             <a:endParaRPr lang="en-US"/>
           </a:p>
@@ -4653,7 +4653,7 @@
           <a:p>
             <a:fld id="{A328F5EC-9457-4081-BA83-1A88B6A3A08E}" type="datetimeFigureOut">
               <a:rPr lang="en-US" smtClean="0"/>
-              <a:t>9/12/2026</a:t>
+              <a:t>9/13/2026</a:t>
             </a:fld>
             <a:endParaRPr lang="en-US"/>
           </a:p>
@@ -4941,7 +4941,7 @@
           <a:p>
             <a:fld id="{A328F5EC-9457-4081-BA83-1A88B6A3A08E}" type="datetimeFigureOut">
               <a:rPr lang="en-US" smtClean="0"/>
-              <a:t>9/12/2026</a:t>
+              <a:t>9/13/2026</a:t>
             </a:fld>
             <a:endParaRPr lang="en-US"/>
           </a:p>
@@ -5182,7 +5182,7 @@
           <a:p>
             <a:fld id="{A328F5EC-9457-4081-BA83-1A88B6A3A08E}" type="datetimeFigureOut">
               <a:rPr lang="en-US" smtClean="0"/>
-              <a:t>9/12/2026</a:t>
+              <a:t>9/13/2026</a:t>
             </a:fld>
             <a:endParaRPr lang="en-US"/>
           </a:p>
@@ -5735,7 +5735,7 @@
             <a:fld id="{402B9795-92DC-40DC-A1CA-9A4B349D7824}" type="datetimeFigureOut">
               <a:rPr lang="en-US" smtClean="0"/>
               <a:pPr/>
-              <a:t>9/12/2026</a:t>
+              <a:t>9/13/2026</a:t>
             </a:fld>
             <a:endParaRPr lang="en-US"/>
           </a:p>
@@ -6596,10 +6596,10 @@
           <p:nvPr/>
         </p:nvPicPr>
         <p:blipFill>
-          <a:blip r:embed="rId3" cstate="email">
+          <a:blip r:embed="rId3">
             <a:extLst>
               <a:ext uri="{28A0092B-C50C-407E-A947-70E740481C1C}">
-                <a14:useLocalDpi xmlns:a14="http://schemas.microsoft.com/office/drawing/2010/main"/>
+                <a14:useLocalDpi xmlns:a14="http://schemas.microsoft.com/office/drawing/2010/main" val="0"/>
               </a:ext>
             </a:extLst>
           </a:blip>
@@ -6608,8 +6608,8 @@
         </p:blipFill>
         <p:spPr>
           <a:xfrm>
-            <a:off x="5237716" y="1600199"/>
-            <a:ext cx="6695252" cy="3874325"/>
+            <a:off x="5242984" y="1600199"/>
+            <a:ext cx="6684715" cy="3874325"/>
           </a:xfrm>
           <a:prstGeom prst="rect">
             <a:avLst/>
@@ -6790,10 +6790,10 @@
           <p:nvPr/>
         </p:nvPicPr>
         <p:blipFill>
-          <a:blip r:embed="rId3" cstate="email">
+          <a:blip r:embed="rId3">
             <a:extLst>
               <a:ext uri="{28A0092B-C50C-407E-A947-70E740481C1C}">
-                <a14:useLocalDpi xmlns:a14="http://schemas.microsoft.com/office/drawing/2010/main"/>
+                <a14:useLocalDpi xmlns:a14="http://schemas.microsoft.com/office/drawing/2010/main" val="0"/>
               </a:ext>
             </a:extLst>
           </a:blip>
@@ -6802,8 +6802,8 @@
         </p:blipFill>
         <p:spPr>
           <a:xfrm>
-            <a:off x="5361920" y="1600199"/>
-            <a:ext cx="6570283" cy="3803073"/>
+            <a:off x="5361993" y="1600199"/>
+            <a:ext cx="6570136" cy="3803073"/>
           </a:xfrm>
           <a:prstGeom prst="rect">
             <a:avLst/>
@@ -7068,8 +7068,8 @@
         </p:blipFill>
         <p:spPr>
           <a:xfrm>
-            <a:off x="5791804" y="1600643"/>
-            <a:ext cx="6140397" cy="3553248"/>
+            <a:off x="5791804" y="1629802"/>
+            <a:ext cx="6140397" cy="3494929"/>
           </a:xfrm>
           <a:prstGeom prst="rect">
             <a:avLst/>
@@ -7261,8 +7261,8 @@
         </p:blipFill>
         <p:spPr>
           <a:xfrm>
-            <a:off x="5355772" y="1600642"/>
-            <a:ext cx="6576430" cy="3805566"/>
+            <a:off x="5355772" y="1614659"/>
+            <a:ext cx="6576430" cy="3777532"/>
           </a:xfrm>
           <a:prstGeom prst="rect">
             <a:avLst/>
@@ -7439,10 +7439,10 @@
           <p:nvPr/>
         </p:nvPicPr>
         <p:blipFill>
-          <a:blip r:embed="rId3" cstate="email">
+          <a:blip r:embed="rId3">
             <a:extLst>
               <a:ext uri="{28A0092B-C50C-407E-A947-70E740481C1C}">
-                <a14:useLocalDpi xmlns:a14="http://schemas.microsoft.com/office/drawing/2010/main"/>
+                <a14:useLocalDpi xmlns:a14="http://schemas.microsoft.com/office/drawing/2010/main" val="0"/>
               </a:ext>
             </a:extLst>
           </a:blip>
@@ -7451,8 +7451,8 @@
         </p:blipFill>
         <p:spPr>
           <a:xfrm>
-            <a:off x="5381368" y="1600643"/>
-            <a:ext cx="6550833" cy="3790754"/>
+            <a:off x="5412211" y="1600643"/>
+            <a:ext cx="6489146" cy="3790754"/>
           </a:xfrm>
           <a:prstGeom prst="rect">
             <a:avLst/>
@@ -9362,21 +9362,20 @@
           <p:nvPr/>
         </p:nvPicPr>
         <p:blipFill>
-          <a:blip r:embed="rId3" cstate="email">
+          <a:blip r:embed="rId3">
             <a:extLst>
               <a:ext uri="{28A0092B-C50C-407E-A947-70E740481C1C}">
-                <a14:useLocalDpi xmlns:a14="http://schemas.microsoft.com/office/drawing/2010/main"/>
+                <a14:useLocalDpi xmlns:a14="http://schemas.microsoft.com/office/drawing/2010/main" val="0"/>
               </a:ext>
             </a:extLst>
           </a:blip>
-          <a:stretch>
-            <a:fillRect/>
-          </a:stretch>
+          <a:srcRect/>
+          <a:stretch/>
         </p:blipFill>
         <p:spPr>
           <a:xfrm>
-            <a:off x="5771380" y="1666349"/>
-            <a:ext cx="5784124" cy="3347085"/>
+            <a:off x="5771380" y="1681930"/>
+            <a:ext cx="5784124" cy="3315923"/>
           </a:xfrm>
           <a:prstGeom prst="rect">
             <a:avLst/>
@@ -9476,10 +9475,10 @@
           <p:nvPr/>
         </p:nvPicPr>
         <p:blipFill>
-          <a:blip r:embed="rId3" cstate="email">
+          <a:blip r:embed="rId3">
             <a:extLst>
               <a:ext uri="{28A0092B-C50C-407E-A947-70E740481C1C}">
-                <a14:useLocalDpi xmlns:a14="http://schemas.microsoft.com/office/drawing/2010/main"/>
+                <a14:useLocalDpi xmlns:a14="http://schemas.microsoft.com/office/drawing/2010/main" val="0"/>
               </a:ext>
             </a:extLst>
           </a:blip>
@@ -9488,8 +9487,8 @@
         </p:blipFill>
         <p:spPr>
           <a:xfrm>
-            <a:off x="5296741" y="1600199"/>
-            <a:ext cx="6637757" cy="3838903"/>
+            <a:off x="5296741" y="1628317"/>
+            <a:ext cx="6637757" cy="3782666"/>
           </a:xfrm>
           <a:prstGeom prst="rect">
             <a:avLst/>
